--- a/brand/beyna-agency/social/editable-pptx/Beyna-Instagram-Posts-1080x1350-EDITABLE.pptx
+++ b/brand/beyna-agency/social/editable-pptx/Beyna-Instagram-Posts-1080x1350-EDITABLE.pptx
@@ -4917,7 +4917,7 @@
             <a:r>
               <a:rPr b="1" sz="12000" spc="-359">
                 <a:solidFill>
-                  <a:srgbClr val="24242B"/>
+                  <a:srgbClr val="1B1046"/>
                 </a:solidFill>
                 <a:latin typeface="Syne"/>
               </a:rPr>
@@ -4933,7 +4933,7 @@
             <a:r>
               <a:rPr b="1" sz="12000" spc="-359">
                 <a:solidFill>
-                  <a:srgbClr val="24242B"/>
+                  <a:srgbClr val="1B1046"/>
                 </a:solidFill>
                 <a:latin typeface="Syne"/>
               </a:rPr>
@@ -5546,7 +5546,7 @@
             <a:r>
               <a:rPr b="1" sz="10650" spc="-319">
                 <a:solidFill>
-                  <a:srgbClr val="24242B"/>
+                  <a:srgbClr val="1B1046"/>
                 </a:solidFill>
                 <a:latin typeface="Syne"/>
               </a:rPr>
@@ -5620,7 +5620,7 @@
             <a:r>
               <a:rPr b="0" sz="2700">
                 <a:solidFill>
-                  <a:srgbClr val="24242B"/>
+                  <a:srgbClr val="1B1046"/>
                 </a:solidFill>
                 <a:latin typeface="Manrope Medium"/>
               </a:rPr>
@@ -5636,7 +5636,7 @@
             <a:r>
               <a:rPr b="0" sz="2700">
                 <a:solidFill>
-                  <a:srgbClr val="24242B"/>
+                  <a:srgbClr val="1B1046"/>
                 </a:solidFill>
                 <a:latin typeface="Manrope Medium"/>
               </a:rPr>
@@ -5652,7 +5652,7 @@
             <a:r>
               <a:rPr b="0" sz="2700">
                 <a:solidFill>
-                  <a:srgbClr val="24242B"/>
+                  <a:srgbClr val="1B1046"/>
                 </a:solidFill>
                 <a:latin typeface="Manrope Medium"/>
               </a:rPr>
@@ -5680,7 +5680,7 @@
           <a:noFill/>
           <a:ln w="28575">
             <a:solidFill>
-              <a:srgbClr val="24242B"/>
+              <a:srgbClr val="1B1046"/>
             </a:solidFill>
           </a:ln>
           <a:effectLst/>
@@ -5707,7 +5707,7 @@
             <a:r>
               <a:rPr b="1" sz="2400">
                 <a:solidFill>
-                  <a:srgbClr val="24242B"/>
+                  <a:srgbClr val="1B1046"/>
                 </a:solidFill>
                 <a:latin typeface="Manrope"/>
               </a:rPr>
@@ -5786,7 +5786,7 @@
             <a:r>
               <a:rPr b="1" sz="7200" spc="-216">
                 <a:solidFill>
-                  <a:srgbClr val="24242B"/>
+                  <a:srgbClr val="1B1046"/>
                 </a:solidFill>
                 <a:latin typeface="Syne"/>
               </a:rPr>
@@ -5819,7 +5819,7 @@
             <a:r>
               <a:rPr b="1" sz="1650" spc="429">
                 <a:solidFill>
-                  <a:srgbClr val="24242B"/>
+                  <a:srgbClr val="1B1046"/>
                 </a:solidFill>
                 <a:latin typeface="Manrope"/>
               </a:rPr>
